--- a/sparks-ai-search/SPARKS_AI_Search_Deck.pptx
+++ b/sparks-ai-search/SPARKS_AI_Search_Deck.pptx
@@ -4535,25 +4535,25 @@
           <a:p>
             <a:r>
               <a:rPr lang="en-US" sz="2400" dirty="0"/>
-              <a:t>After approval (Dev pilot, estimates): one-time embedding ~tens of dollars (one time).</a:t>
+              <a:t>One-time setup (embed all docs): about $5-$20 total, once - then only changed docs re-embed (pennies).</a:t>
             </a:r>
           </a:p>
           <a:p>
             <a:r>
               <a:rPr lang="en-US" sz="2400" dirty="0"/>
-              <a:t>Per query: cents (Option 1); a few times that for Option 2 (more LLM turns).</a:t>
+              <a:t>Per question: ~1-3 cents (Option 1 / RAG); ~4-10 cents (Option 2 / Agentic - more LLM turns).</a:t>
             </a:r>
           </a:p>
           <a:p>
             <a:r>
               <a:rPr lang="en-US" sz="2400" dirty="0"/>
-              <a:t>Monthly Dev pilot: low tens to low hundreds of dollars + small vector capacity.</a:t>
+              <a:t>Monthly Dev pilot (~200 questions/day): roughly $50-$150 + ~$10-$30 small vector storage.</a:t>
             </a:r>
           </a:p>
           <a:p>
             <a:r>
               <a:rPr lang="en-US" sz="2400" dirty="0"/>
-              <a:t>Levers: re-embed only changed docs; cap top_k &amp; context; Haiku for classify / Sonnet for answers; AWS Budgets hard cap.</a:t>
+              <a:t>Guardrails/levers: AWS Budgets hard cap (spend cannot exceed the ceiling); cheaper model for simple steps; cap context size. Figures are planning estimates - confirmed against real doc counts + current Bedrock rates before the pilot.</a:t>
             </a:r>
           </a:p>
         </p:txBody>
